--- a/deck/NIBM_Essex_MSc_Cyber_Business_Case_v2.pptx
+++ b/deck/NIBM_Essex_MSc_Cyber_Business_Case_v2.pptx
@@ -8135,7 +8135,7 @@
                 <a:ea typeface="Open Sans" pitchFamily="34" charset="-122"/>
                 <a:cs typeface="Open Sans" pitchFamily="34" charset="-120"/>
               </a:rPr>
-              <a:t>Microsoft Forms, 6 items, anonymous, fielded 22 to 24 Sep 2026 within NIBM, n = 57. Convenience sample, no population denominator, no fee question. 86% current undergraduates. Purchase-intent weighting stated on each figure.</a:t>
+              <a:t>Microsoft Forms, 6 items, anonymous, fielded 22 to 23 Sep 2026 within NIBM, n = 57. Convenience sample, no population denominator, no fee question. 86% current undergraduates. Purchase-intent weighting stated on each figure.</a:t>
             </a:r>
             <a:endParaRPr lang="en-US" sz="1100" dirty="0"/>
           </a:p>
@@ -8238,7 +8238,7 @@
                 <a:ea typeface="Open Sans" pitchFamily="34" charset="-122"/>
                 <a:cs typeface="Open Sans" pitchFamily="34" charset="-120"/>
               </a:rPr>
-              <a:t>Microsoft Forms, 9 items, named, fielded 22 to 24 Sep 2026, n = 7. Purposive sample of senior practitioners and academics already engaged with NIBM. Qualitative evidence; quoted by sector only, pending attribution consent.</a:t>
+              <a:t>Microsoft Forms, 9 items, named, fielded 22 to 23 Sep 2026, n = 7. Purposive sample of senior practitioners and academics already engaged with NIBM. Qualitative evidence; quoted by sector only, pending attribution consent.</a:t>
             </a:r>
             <a:endParaRPr lang="en-US" sz="1100" dirty="0"/>
           </a:p>
